--- a/docs/presentation/leya.pptx
+++ b/docs/presentation/leya.pptx
@@ -2,20 +2,20 @@
 <file path=ppt/presentation.xml><?xml version="1.0" encoding="utf-8"?>
 <p:presentation xmlns:p="http://schemas.openxmlformats.org/presentationml/2006/main">
   <p:sldMasterIdLst>
-    <p:sldMasterId xmlns:r="http://schemas.openxmlformats.org/officeDocument/2006/relationships" id="2147483648" r:id="Rd5bca9c4a7e84422"/>
+    <p:sldMasterId xmlns:r="http://schemas.openxmlformats.org/officeDocument/2006/relationships" id="2147483648" r:id="Rc8523eb2302144a5"/>
   </p:sldMasterIdLst>
   <p:notesMasterIdLst>
-    <p:notesMasterId xmlns:r="http://schemas.openxmlformats.org/officeDocument/2006/relationships" r:id="R2721dcd861924b4b"/>
+    <p:notesMasterId xmlns:r="http://schemas.openxmlformats.org/officeDocument/2006/relationships" r:id="Rc32f0e22e24d437a"/>
   </p:notesMasterIdLst>
   <p:sldIdLst>
-    <p:sldId xmlns:r="http://schemas.openxmlformats.org/officeDocument/2006/relationships" id="256" r:id="R30421e74951a4a1b"/>
-    <p:sldId xmlns:r="http://schemas.openxmlformats.org/officeDocument/2006/relationships" id="257" r:id="Rcefb19824b5e45b2"/>
-    <p:sldId xmlns:r="http://schemas.openxmlformats.org/officeDocument/2006/relationships" id="258" r:id="Rc8de1c81af3440fa"/>
-    <p:sldId xmlns:r="http://schemas.openxmlformats.org/officeDocument/2006/relationships" id="259" r:id="R344f15647fbb4720"/>
-    <p:sldId xmlns:r="http://schemas.openxmlformats.org/officeDocument/2006/relationships" id="260" r:id="R3f1eceea580d4fda"/>
-    <p:sldId xmlns:r="http://schemas.openxmlformats.org/officeDocument/2006/relationships" id="261" r:id="R913faca7fbf44f7d"/>
-    <p:sldId xmlns:r="http://schemas.openxmlformats.org/officeDocument/2006/relationships" id="262" r:id="R1051f459481145f2"/>
-    <p:sldId xmlns:r="http://schemas.openxmlformats.org/officeDocument/2006/relationships" id="263" r:id="R57c0a61273014135"/>
+    <p:sldId xmlns:r="http://schemas.openxmlformats.org/officeDocument/2006/relationships" id="256" r:id="R3a56448fbe3b400b"/>
+    <p:sldId xmlns:r="http://schemas.openxmlformats.org/officeDocument/2006/relationships" id="257" r:id="R392864bfcd184b5f"/>
+    <p:sldId xmlns:r="http://schemas.openxmlformats.org/officeDocument/2006/relationships" id="258" r:id="R56131c28b81d45a6"/>
+    <p:sldId xmlns:r="http://schemas.openxmlformats.org/officeDocument/2006/relationships" id="259" r:id="Rca8880c3694d4518"/>
+    <p:sldId xmlns:r="http://schemas.openxmlformats.org/officeDocument/2006/relationships" id="260" r:id="Rda8a497a59df4b66"/>
+    <p:sldId xmlns:r="http://schemas.openxmlformats.org/officeDocument/2006/relationships" id="261" r:id="R140e8eb5112949a7"/>
+    <p:sldId xmlns:r="http://schemas.openxmlformats.org/officeDocument/2006/relationships" id="262" r:id="R2e249ccf8fad4962"/>
+    <p:sldId xmlns:r="http://schemas.openxmlformats.org/officeDocument/2006/relationships" id="263" r:id="Ref83497e50a94ef8"/>
   </p:sldIdLst>
   <p:sldSz cx="12192000" cy="6858000"/>
   <p:notesSz cx="6858000" cy="9144000"/>
@@ -449,7 +449,7 @@
           <a:lstStyle xmlns:a="http://schemas.openxmlformats.org/drawingml/2006/main"/>
           <a:p xmlns:a="http://schemas.openxmlformats.org/drawingml/2006/main">
             <a:r>
-              <a:t>Краткая техническая презентация для жюри. Исследовательский прототип. Иллюстрация из проекта, создана ImageGen, не фотография. Источники: README.md и DESIGN.md.</a:t>
+              <a:t>Краткая техническая презентация для жюри. Исследовательский прототип. Иллюстрация проекта. Источники: README.md и DESIGN.md.</a:t>
             </a:r>
           </a:p>
         </p:txBody>
@@ -519,7 +519,7 @@
           <a:lstStyle xmlns:a="http://schemas.openxmlformats.org/drawingml/2006/main"/>
           <a:p xmlns:a="http://schemas.openxmlformats.org/drawingml/2006/main">
             <a:r>
-              <a:t>Продуктовая цель и задачи из README.md. Отсутствие анализа не означает норму или диагноз. Польза для врача является гипотезой, время консультации в исследовании не измерялось.</a:t>
+              <a:t>Источник: https://www.who.int/data/gho/data/themes/topics/anaemia_in_women_and_children . WHO Global Anaemia Estimates, 2025 Edition. Оценка за 2023 год: 30,7% женщин 15–49 лет во всём мире. Дата обращения: 04.10.2026. Это популяционная оценка анемии, не скрытых дефицитов. Группа ВОЗ отличается от области MVP. Статистика служит обоснованием актуальности и не входит в обучение или проверку качества модели. Модель использует только предоставленный датасет. Подробнее: docs/WHO_STATISTICS.md.</a:t>
             </a:r>
           </a:p>
         </p:txBody>
@@ -659,7 +659,7 @@
           <a:lstStyle xmlns:a="http://schemas.openxmlformats.org/drawingml/2006/main"/>
           <a:p xmlns:a="http://schemas.openxmlformats.org/drawingml/2006/main">
             <a:r>
-              <a:t>docs/DATA.md и dist/import.js. RDW-CV необязателен. Ретикулоциты вынесены в дополнительные исследования. PDF, фотографии и старый XLS не распознаются.</a:t>
+              <a:t>docs/DATA.md и dist/pdf-import.js. Поддерживается текстовый PDF со столбцами «Тест», «Результат», «Норма», «Ед. изм.». Файл до 5 МБ и 10 страниц. Пользователь сверяет результаты, исправляет их и подтверждает перенос в форму. Сканы и фотографии не поддерживаются. RDW-CV необязателен, ретикулоциты относятся к дополнительным исследованиям.</a:t>
             </a:r>
           </a:p>
         </p:txBody>
@@ -729,7 +729,7 @@
           <a:lstStyle xmlns:a="http://schemas.openxmlformats.org/drawingml/2006/main"/>
           <a:p xmlns:a="http://schemas.openxmlformats.org/drawingml/2006/main">
             <a:r>
-              <a:t>Архитектура: docs/ARCHITECTURE.md. Модули: app.js, import.js, engine.js, workflow.js. Отдельное правило Hb, Random Forest, шаблоны текста. Нет внешнего сервиса LLM. Автономный HTML включает ресурсы и модель.</a:t>
+              <a:t>Архитектура: docs/ARCHITECTURE.md. Модули: app.js, pdf-import.js, engine.js, workflow.js. Отдельное правило Hb, Random Forest, шаблоны текста. Нет внешнего сервиса LLM. Автономный HTML включает ресурсы и модель.</a:t>
             </a:r>
           </a:p>
         </p:txBody>
@@ -1007,7 +1007,7 @@
   </p:cSld>
   <p:clrMap bg1="lt1" tx1="dk1" bg2="lt2" tx2="dk2" accent1="accent1" accent2="accent2" accent3="accent3" accent4="accent4" accent5="accent5" accent6="accent6" hlink="hlink" folHlink="folHlink"/>
   <p:sldLayoutIdLst>
-    <p:sldLayoutId xmlns:r="http://schemas.openxmlformats.org/officeDocument/2006/relationships" id="2147483649" r:id="Ra0114d61ebbf46d8"/>
+    <p:sldLayoutId xmlns:r="http://schemas.openxmlformats.org/officeDocument/2006/relationships" id="2147483649" r:id="R25a4fccf8d4d4419"/>
   </p:sldLayoutIdLst>
   <p:txStyles>
     <p:titleStyle>
@@ -1558,7 +1558,7 @@
           <p:cNvPr id="7" name="">
             <a:extLst xmlns:a="http://schemas.openxmlformats.org/drawingml/2006/main">
               <a:ext uri="{FF2B5EF4-FFF2-40B4-BE49-F238E27FC236}">
-                <a16:creationId xmlns:a16="http://schemas.microsoft.com/office/drawing/2014/main" id="{6C07DB4D-E43B-44AC-A5FB-B186608E0337}"/>
+                <a16:creationId xmlns:a16="http://schemas.microsoft.com/office/drawing/2014/main" id="{57324F35-1947-47D7-838E-AF06F51C082D}"/>
               </a:ext>
             </a:extLst>
           </p:cNvPr>
@@ -1615,7 +1615,7 @@
           <p:cNvPr id="2" name="">
             <a:extLst xmlns:a="http://schemas.openxmlformats.org/drawingml/2006/main">
               <a:ext uri="{FF2B5EF4-FFF2-40B4-BE49-F238E27FC236}">
-                <a16:creationId xmlns:a16="http://schemas.microsoft.com/office/drawing/2014/main" id="{C8958CE6-FB00-4F69-A593-1C37DB2930E1}"/>
+                <a16:creationId xmlns:a16="http://schemas.microsoft.com/office/drawing/2014/main" id="{25C25BC6-1732-4EAE-814F-7A0FE6848611}"/>
               </a:ext>
             </a:extLst>
           </p:cNvPr>
@@ -1672,7 +1672,7 @@
           <p:cNvPr id="3" name="">
             <a:extLst xmlns:a="http://schemas.openxmlformats.org/drawingml/2006/main">
               <a:ext uri="{FF2B5EF4-FFF2-40B4-BE49-F238E27FC236}">
-                <a16:creationId xmlns:a16="http://schemas.microsoft.com/office/drawing/2014/main" id="{CE796DC0-B03D-488F-A35D-B160C9779677}"/>
+                <a16:creationId xmlns:a16="http://schemas.microsoft.com/office/drawing/2014/main" id="{F93AF5C7-6075-4665-A5A4-FE346A2B2A69}"/>
               </a:ext>
             </a:extLst>
           </p:cNvPr>
@@ -1752,7 +1752,7 @@
           <p:cNvPr id="4" name="">
             <a:extLst xmlns:a="http://schemas.openxmlformats.org/drawingml/2006/main">
               <a:ext uri="{FF2B5EF4-FFF2-40B4-BE49-F238E27FC236}">
-                <a16:creationId xmlns:a16="http://schemas.microsoft.com/office/drawing/2014/main" id="{F4CA1D3C-B7A4-4915-BC40-7B8FBFD3D856}"/>
+                <a16:creationId xmlns:a16="http://schemas.microsoft.com/office/drawing/2014/main" id="{6BFB8580-9043-495E-9349-BE9F5BED21A5}"/>
               </a:ext>
             </a:extLst>
           </p:cNvPr>
@@ -1809,7 +1809,7 @@
           <p:cNvPr id="5" name="">
             <a:extLst xmlns:a="http://schemas.openxmlformats.org/drawingml/2006/main">
               <a:ext uri="{FF2B5EF4-FFF2-40B4-BE49-F238E27FC236}">
-                <a16:creationId xmlns:a16="http://schemas.microsoft.com/office/drawing/2014/main" id="{5B6A6B1F-5A1D-4171-A9ED-9A2FB436AB32}"/>
+                <a16:creationId xmlns:a16="http://schemas.microsoft.com/office/drawing/2014/main" id="{3ED1115B-6AF4-4E92-ABCA-EC12B0CD0434}"/>
               </a:ext>
             </a:extLst>
           </p:cNvPr>
@@ -1870,7 +1870,7 @@
           <p:nvPr/>
         </p:nvPicPr>
         <p:blipFill>
-          <a:blip xmlns:r="http://schemas.openxmlformats.org/officeDocument/2006/relationships" xmlns:a="http://schemas.openxmlformats.org/drawingml/2006/main" r:embed="R7d48664f387f41b9"/>
+          <a:blip xmlns:r="http://schemas.openxmlformats.org/officeDocument/2006/relationships" xmlns:a="http://schemas.openxmlformats.org/drawingml/2006/main" r:embed="R534d99f3733e43ec"/>
           <a:stretch xmlns:a="http://schemas.openxmlformats.org/drawingml/2006/main"/>
         </p:blipFill>
         <p:spPr>
@@ -1886,7 +1886,7 @@
     </p:spTree>
     <p:extLst>
       <p:ext uri="{BB962C8B-B14F-4D97-AF65-F5344CB8AC3E}">
-        <p14:creationId xmlns:p14="http://schemas.microsoft.com/office/powerpoint/2010/main" val="491137911"/>
+        <p14:creationId xmlns:p14="http://schemas.microsoft.com/office/powerpoint/2010/main" val="1650763785"/>
       </p:ext>
     </p:extLst>
   </p:cSld>
@@ -1914,10 +1914,10 @@
       </p:grpSpPr>
       <p:sp>
         <p:nvSpPr>
-          <p:cNvPr id="6" name="">
+          <p:cNvPr id="8" name="">
             <a:extLst xmlns:a="http://schemas.openxmlformats.org/drawingml/2006/main">
               <a:ext uri="{FF2B5EF4-FFF2-40B4-BE49-F238E27FC236}">
-                <a16:creationId xmlns:a16="http://schemas.microsoft.com/office/drawing/2014/main" id="{E2524F40-160C-4CEF-B96F-C594987E41C2}"/>
+                <a16:creationId xmlns:a16="http://schemas.microsoft.com/office/drawing/2014/main" id="{BF9A9A5A-EB49-4EFA-8B0A-4A432FA7CCFD}"/>
               </a:ext>
             </a:extLst>
           </p:cNvPr>
@@ -1964,7 +1964,7 @@
                 <a:ea typeface="Unbounded"/>
                 <a:cs typeface="Unbounded"/>
               </a:rPr>
-              <a:t>Задача проекта</a:t>
+              <a:t>Анемия: масштаб проблемы</a:t>
             </a:r>
           </a:p>
         </p:txBody>
@@ -1974,7 +1974,7 @@
           <p:cNvPr id="2" name="">
             <a:extLst xmlns:a="http://schemas.openxmlformats.org/drawingml/2006/main">
               <a:ext uri="{FF2B5EF4-FFF2-40B4-BE49-F238E27FC236}">
-                <a16:creationId xmlns:a16="http://schemas.microsoft.com/office/drawing/2014/main" id="{EC52910F-6F82-47C1-A115-88BEDD5EA97A}"/>
+                <a16:creationId xmlns:a16="http://schemas.microsoft.com/office/drawing/2014/main" id="{45A3A441-A744-43BB-8979-03DC1DB824F5}"/>
               </a:ext>
             </a:extLst>
           </p:cNvPr>
@@ -2031,7 +2031,7 @@
           <p:cNvPr id="3" name="">
             <a:extLst xmlns:a="http://schemas.openxmlformats.org/drawingml/2006/main">
               <a:ext uri="{FF2B5EF4-FFF2-40B4-BE49-F238E27FC236}">
-                <a16:creationId xmlns:a16="http://schemas.microsoft.com/office/drawing/2014/main" id="{0FA23375-FBB3-44DA-B32F-E017732471D6}"/>
+                <a16:creationId xmlns:a16="http://schemas.microsoft.com/office/drawing/2014/main" id="{16D9E6B7-4092-4ADD-9888-D29EDE7ED4BF}"/>
               </a:ext>
             </a:extLst>
           </p:cNvPr>
@@ -2042,8 +2042,8 @@
         </p:nvSpPr>
         <p:spPr>
           <a:xfrm xmlns:a="http://schemas.openxmlformats.org/drawingml/2006/main">
-            <a:off x="685800" y="1857375"/>
-            <a:ext cx="10477500" cy="619125"/>
+            <a:off x="685800" y="1809750"/>
+            <a:ext cx="3619500" cy="1285875"/>
           </a:xfrm>
           <a:prstGeom xmlns:a="http://schemas.openxmlformats.org/drawingml/2006/main" prst="rect">
             <a:avLst/>
@@ -2060,25 +2060,25 @@
           <a:lstStyle xmlns:a="http://schemas.openxmlformats.org/drawingml/2006/main"/>
           <a:p xmlns:a="http://schemas.openxmlformats.org/drawingml/2006/main">
             <a:pPr>
-              <a:defRPr sz="2850" b="1">
-                <a:solidFill>
-                  <a:srgbClr val="20382B"/>
-                </a:solidFill>
-                <a:latin typeface="Manrope"/>
-                <a:ea typeface="Manrope"/>
-                <a:cs typeface="Manrope"/>
-              </a:defRPr>
-            </a:pPr>
-            <a:r>
-              <a:rPr sz="2850" b="1">
-                <a:solidFill>
-                  <a:srgbClr val="20382B"/>
-                </a:solidFill>
-                <a:latin typeface="Manrope"/>
-                <a:ea typeface="Manrope"/>
-                <a:cs typeface="Manrope"/>
-              </a:rPr>
-              <a:t>У пациентов разные наборы анализов</a:t>
+              <a:defRPr sz="6450" b="1">
+                <a:solidFill>
+                  <a:srgbClr val="345D42"/>
+                </a:solidFill>
+                <a:latin typeface="Unbounded"/>
+                <a:ea typeface="Unbounded"/>
+                <a:cs typeface="Unbounded"/>
+              </a:defRPr>
+            </a:pPr>
+            <a:r>
+              <a:rPr sz="6450" b="1">
+                <a:solidFill>
+                  <a:srgbClr val="345D42"/>
+                </a:solidFill>
+                <a:latin typeface="Unbounded"/>
+                <a:ea typeface="Unbounded"/>
+                <a:cs typeface="Unbounded"/>
+              </a:rPr>
+              <a:t>30,7%</a:t>
             </a:r>
           </a:p>
         </p:txBody>
@@ -2088,7 +2088,7 @@
           <p:cNvPr id="4" name="">
             <a:extLst xmlns:a="http://schemas.openxmlformats.org/drawingml/2006/main">
               <a:ext uri="{FF2B5EF4-FFF2-40B4-BE49-F238E27FC236}">
-                <a16:creationId xmlns:a16="http://schemas.microsoft.com/office/drawing/2014/main" id="{32FA091A-85CD-4C0C-B8B2-7A875DC175F2}"/>
+                <a16:creationId xmlns:a16="http://schemas.microsoft.com/office/drawing/2014/main" id="{01E33687-7598-4F8B-934A-0B4A2601EED5}"/>
               </a:ext>
             </a:extLst>
           </p:cNvPr>
@@ -2099,8 +2099,8 @@
         </p:nvSpPr>
         <p:spPr>
           <a:xfrm xmlns:a="http://schemas.openxmlformats.org/drawingml/2006/main">
-            <a:off x="685800" y="2809875"/>
-            <a:ext cx="10668000" cy="1190625"/>
+            <a:off x="4667250" y="1952625"/>
+            <a:ext cx="6762750" cy="1190625"/>
           </a:xfrm>
           <a:prstGeom xmlns:a="http://schemas.openxmlformats.org/drawingml/2006/main" prst="rect">
             <a:avLst/>
@@ -2117,48 +2117,48 @@
           <a:lstStyle xmlns:a="http://schemas.openxmlformats.org/drawingml/2006/main"/>
           <a:p xmlns:a="http://schemas.openxmlformats.org/drawingml/2006/main">
             <a:pPr>
-              <a:defRPr sz="2400" b="0">
-                <a:solidFill>
-                  <a:srgbClr val="20382B"/>
-                </a:solidFill>
-                <a:latin typeface="Manrope"/>
-                <a:ea typeface="Manrope"/>
-                <a:cs typeface="Manrope"/>
-              </a:defRPr>
-            </a:pPr>
-            <a:r>
-              <a:rPr sz="2400" b="0">
-                <a:solidFill>
-                  <a:srgbClr val="20382B"/>
-                </a:solidFill>
-                <a:latin typeface="Manrope"/>
-                <a:ea typeface="Manrope"/>
-                <a:cs typeface="Manrope"/>
-              </a:rPr>
-              <a:t>Часть показателей отсутствует. Врач должен видеть,</a:t>
-            </a:r>
-          </a:p>
-          <a:p xmlns:a="http://schemas.openxmlformats.org/drawingml/2006/main">
-            <a:pPr>
-              <a:defRPr sz="2400" b="0">
-                <a:solidFill>
-                  <a:srgbClr val="20382B"/>
-                </a:solidFill>
-                <a:latin typeface="Manrope"/>
-                <a:ea typeface="Manrope"/>
-                <a:cs typeface="Manrope"/>
-              </a:defRPr>
-            </a:pPr>
-            <a:r>
-              <a:rPr sz="2400" b="0">
-                <a:solidFill>
-                  <a:srgbClr val="20382B"/>
-                </a:solidFill>
-                <a:latin typeface="Manrope"/>
-                <a:ea typeface="Manrope"/>
-                <a:cs typeface="Manrope"/>
-              </a:rPr>
-              <a:t>какие выводы доступны и что остаётся неизвестным.</a:t>
+              <a:defRPr sz="2400" b="1">
+                <a:solidFill>
+                  <a:srgbClr val="20382B"/>
+                </a:solidFill>
+                <a:latin typeface="Manrope"/>
+                <a:ea typeface="Manrope"/>
+                <a:cs typeface="Manrope"/>
+              </a:defRPr>
+            </a:pPr>
+            <a:r>
+              <a:rPr sz="2400" b="1">
+                <a:solidFill>
+                  <a:srgbClr val="20382B"/>
+                </a:solidFill>
+                <a:latin typeface="Manrope"/>
+                <a:ea typeface="Manrope"/>
+                <a:cs typeface="Manrope"/>
+              </a:rPr>
+              <a:t>женщин 15–49 лет в мире</a:t>
+            </a:r>
+          </a:p>
+          <a:p xmlns:a="http://schemas.openxmlformats.org/drawingml/2006/main">
+            <a:pPr>
+              <a:defRPr sz="2400" b="1">
+                <a:solidFill>
+                  <a:srgbClr val="20382B"/>
+                </a:solidFill>
+                <a:latin typeface="Manrope"/>
+                <a:ea typeface="Manrope"/>
+                <a:cs typeface="Manrope"/>
+              </a:defRPr>
+            </a:pPr>
+            <a:r>
+              <a:rPr sz="2400" b="1">
+                <a:solidFill>
+                  <a:srgbClr val="20382B"/>
+                </a:solidFill>
+                <a:latin typeface="Manrope"/>
+                <a:ea typeface="Manrope"/>
+                <a:cs typeface="Manrope"/>
+              </a:rPr>
+              <a:t>жили с анемией в 2023 году</a:t>
             </a:r>
           </a:p>
         </p:txBody>
@@ -2168,7 +2168,7 @@
           <p:cNvPr id="5" name="">
             <a:extLst xmlns:a="http://schemas.openxmlformats.org/drawingml/2006/main">
               <a:ext uri="{FF2B5EF4-FFF2-40B4-BE49-F238E27FC236}">
-                <a16:creationId xmlns:a16="http://schemas.microsoft.com/office/drawing/2014/main" id="{0074FCF3-EC1A-41F0-94E9-D7956868ABC9}"/>
+                <a16:creationId xmlns:a16="http://schemas.microsoft.com/office/drawing/2014/main" id="{CB8CC9F1-8066-40FD-8008-166B0D626A30}"/>
               </a:ext>
             </a:extLst>
           </p:cNvPr>
@@ -2179,8 +2179,8 @@
         </p:nvSpPr>
         <p:spPr>
           <a:xfrm xmlns:a="http://schemas.openxmlformats.org/drawingml/2006/main">
-            <a:off x="685800" y="4524375"/>
-            <a:ext cx="10572750" cy="1143000"/>
+            <a:off x="685800" y="3619500"/>
+            <a:ext cx="10820400" cy="1476375"/>
           </a:xfrm>
           <a:prstGeom xmlns:a="http://schemas.openxmlformats.org/drawingml/2006/main" prst="rect">
             <a:avLst/>
@@ -2197,48 +2197,208 @@
           <a:lstStyle xmlns:a="http://schemas.openxmlformats.org/drawingml/2006/main"/>
           <a:p xmlns:a="http://schemas.openxmlformats.org/drawingml/2006/main">
             <a:pPr>
-              <a:defRPr sz="2400" b="0">
-                <a:solidFill>
-                  <a:srgbClr val="20382B"/>
-                </a:solidFill>
-                <a:latin typeface="Manrope"/>
-                <a:ea typeface="Manrope"/>
-                <a:cs typeface="Manrope"/>
-              </a:defRPr>
-            </a:pPr>
-            <a:r>
-              <a:rPr sz="2400" b="0">
-                <a:solidFill>
-                  <a:srgbClr val="20382B"/>
-                </a:solidFill>
-                <a:latin typeface="Manrope"/>
-                <a:ea typeface="Manrope"/>
-                <a:cs typeface="Manrope"/>
-              </a:rPr>
-              <a:t>Лея собирает результаты в сводку и помогает</a:t>
-            </a:r>
-          </a:p>
-          <a:p xmlns:a="http://schemas.openxmlformats.org/drawingml/2006/main">
-            <a:pPr>
-              <a:defRPr sz="2400" b="0">
-                <a:solidFill>
-                  <a:srgbClr val="20382B"/>
-                </a:solidFill>
-                <a:latin typeface="Manrope"/>
-                <a:ea typeface="Manrope"/>
-                <a:cs typeface="Manrope"/>
-              </a:defRPr>
-            </a:pPr>
-            <a:r>
-              <a:rPr sz="2400" b="0">
-                <a:solidFill>
-                  <a:srgbClr val="20382B"/>
-                </a:solidFill>
-                <a:latin typeface="Manrope"/>
-                <a:ea typeface="Manrope"/>
-                <a:cs typeface="Manrope"/>
-              </a:rPr>
-              <a:t>подготовить объяснение для пациента.</a:t>
+              <a:defRPr sz="2325" b="0">
+                <a:solidFill>
+                  <a:srgbClr val="20382B"/>
+                </a:solidFill>
+                <a:latin typeface="Manrope"/>
+                <a:ea typeface="Manrope"/>
+                <a:cs typeface="Manrope"/>
+              </a:defRPr>
+            </a:pPr>
+            <a:r>
+              <a:rPr sz="2325" b="0">
+                <a:solidFill>
+                  <a:srgbClr val="20382B"/>
+                </a:solidFill>
+                <a:latin typeface="Manrope"/>
+                <a:ea typeface="Manrope"/>
+                <a:cs typeface="Manrope"/>
+              </a:rPr>
+              <a:t>У пациентов разные наборы анализов.</a:t>
+            </a:r>
+          </a:p>
+          <a:p xmlns:a="http://schemas.openxmlformats.org/drawingml/2006/main">
+            <a:pPr>
+              <a:defRPr sz="2325" b="0">
+                <a:solidFill>
+                  <a:srgbClr val="20382B"/>
+                </a:solidFill>
+                <a:latin typeface="Manrope"/>
+                <a:ea typeface="Manrope"/>
+                <a:cs typeface="Manrope"/>
+              </a:defRPr>
+            </a:pPr>
+            <a:r>
+              <a:rPr sz="2325" b="0">
+                <a:solidFill>
+                  <a:srgbClr val="20382B"/>
+                </a:solidFill>
+                <a:latin typeface="Manrope"/>
+                <a:ea typeface="Manrope"/>
+                <a:cs typeface="Manrope"/>
+              </a:rPr>
+              <a:t>Лея собирает результаты в сводку для врача</a:t>
+            </a:r>
+          </a:p>
+          <a:p xmlns:a="http://schemas.openxmlformats.org/drawingml/2006/main">
+            <a:pPr>
+              <a:defRPr sz="2325" b="0">
+                <a:solidFill>
+                  <a:srgbClr val="20382B"/>
+                </a:solidFill>
+                <a:latin typeface="Manrope"/>
+                <a:ea typeface="Manrope"/>
+                <a:cs typeface="Manrope"/>
+              </a:defRPr>
+            </a:pPr>
+            <a:r>
+              <a:rPr sz="2325" b="0">
+                <a:solidFill>
+                  <a:srgbClr val="20382B"/>
+                </a:solidFill>
+                <a:latin typeface="Manrope"/>
+                <a:ea typeface="Manrope"/>
+                <a:cs typeface="Manrope"/>
+              </a:rPr>
+              <a:t>и помогает объяснить их пациенту.</a:t>
+            </a:r>
+          </a:p>
+        </p:txBody>
+      </p:sp>
+      <p:sp>
+        <p:nvSpPr>
+          <p:cNvPr id="6" name="">
+            <a:extLst xmlns:a="http://schemas.openxmlformats.org/drawingml/2006/main">
+              <a:ext uri="{FF2B5EF4-FFF2-40B4-BE49-F238E27FC236}">
+                <a16:creationId xmlns:a16="http://schemas.microsoft.com/office/drawing/2014/main" id="{BDE52DD4-A88F-4280-B13A-2200A296C939}"/>
+              </a:ext>
+            </a:extLst>
+          </p:cNvPr>
+          <p:cNvSpPr>
+            <a:spLocks xmlns:a="http://schemas.openxmlformats.org/drawingml/2006/main" noGrp="1"/>
+          </p:cNvSpPr>
+          <p:nvPr/>
+        </p:nvSpPr>
+        <p:spPr>
+          <a:xfrm xmlns:a="http://schemas.openxmlformats.org/drawingml/2006/main">
+            <a:off x="685800" y="5400675"/>
+            <a:ext cx="10820400" cy="590550"/>
+          </a:xfrm>
+          <a:prstGeom xmlns:a="http://schemas.openxmlformats.org/drawingml/2006/main" prst="rect">
+            <a:avLst/>
+          </a:prstGeom>
+          <a:noFill xmlns:a="http://schemas.openxmlformats.org/drawingml/2006/main"/>
+          <a:ln xmlns:a="http://schemas.openxmlformats.org/drawingml/2006/main" w="0">
+            <a:noFill/>
+          </a:ln>
+        </p:spPr>
+        <p:txBody>
+          <a:bodyPr xmlns:a="http://schemas.openxmlformats.org/drawingml/2006/main">
+            <a:noAutofit/>
+          </a:bodyPr>
+          <a:lstStyle xmlns:a="http://schemas.openxmlformats.org/drawingml/2006/main"/>
+          <a:p xmlns:a="http://schemas.openxmlformats.org/drawingml/2006/main">
+            <a:pPr>
+              <a:defRPr sz="1500" b="0">
+                <a:solidFill>
+                  <a:srgbClr val="20382B"/>
+                </a:solidFill>
+                <a:latin typeface="Manrope"/>
+                <a:ea typeface="Manrope"/>
+                <a:cs typeface="Manrope"/>
+              </a:defRPr>
+            </a:pPr>
+            <a:r>
+              <a:rPr sz="1500" b="0">
+                <a:solidFill>
+                  <a:srgbClr val="20382B"/>
+                </a:solidFill>
+                <a:latin typeface="Manrope"/>
+                <a:ea typeface="Manrope"/>
+                <a:cs typeface="Manrope"/>
+              </a:rPr>
+              <a:t>ВОЗ, глобальные оценки анемии, выпуск 2025 года.</a:t>
+            </a:r>
+          </a:p>
+          <a:p xmlns:a="http://schemas.openxmlformats.org/drawingml/2006/main">
+            <a:pPr>
+              <a:defRPr sz="1500" b="0">
+                <a:solidFill>
+                  <a:srgbClr val="20382B"/>
+                </a:solidFill>
+                <a:latin typeface="Manrope"/>
+                <a:ea typeface="Manrope"/>
+                <a:cs typeface="Manrope"/>
+              </a:defRPr>
+            </a:pPr>
+            <a:r>
+              <a:rPr sz="1500" b="0">
+                <a:solidFill>
+                  <a:srgbClr val="20382B"/>
+                </a:solidFill>
+                <a:latin typeface="Manrope"/>
+                <a:ea typeface="Manrope"/>
+                <a:cs typeface="Manrope"/>
+              </a:rPr>
+              <a:t>Показатель описывает анемию. Распространённость скрытых дефицитов здесь не оценена.</a:t>
+            </a:r>
+          </a:p>
+        </p:txBody>
+      </p:sp>
+      <p:sp>
+        <p:nvSpPr>
+          <p:cNvPr id="7" name="">
+            <a:extLst xmlns:a="http://schemas.openxmlformats.org/drawingml/2006/main">
+              <a:ext uri="{FF2B5EF4-FFF2-40B4-BE49-F238E27FC236}">
+                <a16:creationId xmlns:a16="http://schemas.microsoft.com/office/drawing/2014/main" id="{7D977AED-2561-4973-ADC3-D40D22502A6F}"/>
+              </a:ext>
+            </a:extLst>
+          </p:cNvPr>
+          <p:cNvSpPr>
+            <a:spLocks xmlns:a="http://schemas.openxmlformats.org/drawingml/2006/main" noGrp="1"/>
+          </p:cNvSpPr>
+          <p:nvPr/>
+        </p:nvSpPr>
+        <p:spPr>
+          <a:xfrm xmlns:a="http://schemas.openxmlformats.org/drawingml/2006/main">
+            <a:off x="685800" y="6048375"/>
+            <a:ext cx="10477500" cy="304800"/>
+          </a:xfrm>
+          <a:prstGeom xmlns:a="http://schemas.openxmlformats.org/drawingml/2006/main" prst="rect">
+            <a:avLst/>
+          </a:prstGeom>
+          <a:noFill xmlns:a="http://schemas.openxmlformats.org/drawingml/2006/main"/>
+          <a:ln xmlns:a="http://schemas.openxmlformats.org/drawingml/2006/main" w="0">
+            <a:noFill/>
+          </a:ln>
+        </p:spPr>
+        <p:txBody>
+          <a:bodyPr xmlns:a="http://schemas.openxmlformats.org/drawingml/2006/main">
+            <a:noAutofit/>
+          </a:bodyPr>
+          <a:lstStyle xmlns:a="http://schemas.openxmlformats.org/drawingml/2006/main"/>
+          <a:p xmlns:a="http://schemas.openxmlformats.org/drawingml/2006/main">
+            <a:pPr>
+              <a:defRPr sz="1350" b="0">
+                <a:solidFill>
+                  <a:srgbClr val="345D42"/>
+                </a:solidFill>
+                <a:latin typeface="Manrope"/>
+                <a:ea typeface="Manrope"/>
+                <a:cs typeface="Manrope"/>
+              </a:defRPr>
+            </a:pPr>
+            <a:r>
+              <a:rPr sz="1350" b="0">
+                <a:solidFill>
+                  <a:srgbClr val="345D42"/>
+                </a:solidFill>
+                <a:latin typeface="Manrope"/>
+                <a:ea typeface="Manrope"/>
+                <a:cs typeface="Manrope"/>
+              </a:rPr>
+              <a:t>who.int/data/gho/data/themes/topics/anaemia_in_women_and_children</a:t>
             </a:r>
           </a:p>
         </p:txBody>
@@ -2246,7 +2406,7 @@
     </p:spTree>
     <p:extLst>
       <p:ext uri="{BB962C8B-B14F-4D97-AF65-F5344CB8AC3E}">
-        <p14:creationId xmlns:p14="http://schemas.microsoft.com/office/powerpoint/2010/main" val="867427681"/>
+        <p14:creationId xmlns:p14="http://schemas.microsoft.com/office/powerpoint/2010/main" val="247552058"/>
       </p:ext>
     </p:extLst>
   </p:cSld>
@@ -2277,7 +2437,7 @@
           <p:cNvPr id="8" name="">
             <a:extLst xmlns:a="http://schemas.openxmlformats.org/drawingml/2006/main">
               <a:ext uri="{FF2B5EF4-FFF2-40B4-BE49-F238E27FC236}">
-                <a16:creationId xmlns:a16="http://schemas.microsoft.com/office/drawing/2014/main" id="{D4030892-A398-46F5-8E7E-7F0E6E7994EB}"/>
+                <a16:creationId xmlns:a16="http://schemas.microsoft.com/office/drawing/2014/main" id="{E9666BCA-C412-4FE4-AD03-072C2A318DBD}"/>
               </a:ext>
             </a:extLst>
           </p:cNvPr>
@@ -2334,7 +2494,7 @@
           <p:cNvPr id="2" name="">
             <a:extLst xmlns:a="http://schemas.openxmlformats.org/drawingml/2006/main">
               <a:ext uri="{FF2B5EF4-FFF2-40B4-BE49-F238E27FC236}">
-                <a16:creationId xmlns:a16="http://schemas.microsoft.com/office/drawing/2014/main" id="{11EFA65D-2087-4A86-AEB7-F9F3031EE033}"/>
+                <a16:creationId xmlns:a16="http://schemas.microsoft.com/office/drawing/2014/main" id="{A5FC8891-751C-4B7C-9A7C-5F9E2C724887}"/>
               </a:ext>
             </a:extLst>
           </p:cNvPr>
@@ -2391,7 +2551,7 @@
           <p:cNvPr id="3" name="">
             <a:extLst xmlns:a="http://schemas.openxmlformats.org/drawingml/2006/main">
               <a:ext uri="{FF2B5EF4-FFF2-40B4-BE49-F238E27FC236}">
-                <a16:creationId xmlns:a16="http://schemas.microsoft.com/office/drawing/2014/main" id="{836DDE91-2569-43C7-9712-F2E07036E630}"/>
+                <a16:creationId xmlns:a16="http://schemas.microsoft.com/office/drawing/2014/main" id="{F99DC571-2351-4F62-90E2-505A6FCF65FD}"/>
               </a:ext>
             </a:extLst>
           </p:cNvPr>
@@ -2448,7 +2608,7 @@
           <p:cNvPr id="4" name="">
             <a:extLst xmlns:a="http://schemas.openxmlformats.org/drawingml/2006/main">
               <a:ext uri="{FF2B5EF4-FFF2-40B4-BE49-F238E27FC236}">
-                <a16:creationId xmlns:a16="http://schemas.microsoft.com/office/drawing/2014/main" id="{23363396-798C-455B-AACC-4E5E5D6F4A77}"/>
+                <a16:creationId xmlns:a16="http://schemas.microsoft.com/office/drawing/2014/main" id="{53D00868-538A-4647-BD57-98DD7A00A5FB}"/>
               </a:ext>
             </a:extLst>
           </p:cNvPr>
@@ -2574,7 +2734,7 @@
           <p:cNvPr id="5" name="">
             <a:extLst xmlns:a="http://schemas.openxmlformats.org/drawingml/2006/main">
               <a:ext uri="{FF2B5EF4-FFF2-40B4-BE49-F238E27FC236}">
-                <a16:creationId xmlns:a16="http://schemas.microsoft.com/office/drawing/2014/main" id="{C3BE6C89-7669-4685-8EA9-9FDFA8CFC850}"/>
+                <a16:creationId xmlns:a16="http://schemas.microsoft.com/office/drawing/2014/main" id="{CE9B67AA-9A0F-4095-9B16-9314E6A6DD81}"/>
               </a:ext>
             </a:extLst>
           </p:cNvPr>
@@ -2631,7 +2791,7 @@
           <p:cNvPr id="6" name="">
             <a:extLst xmlns:a="http://schemas.openxmlformats.org/drawingml/2006/main">
               <a:ext uri="{FF2B5EF4-FFF2-40B4-BE49-F238E27FC236}">
-                <a16:creationId xmlns:a16="http://schemas.microsoft.com/office/drawing/2014/main" id="{326768E5-C98B-4733-8FBF-CB0F509D9177}"/>
+                <a16:creationId xmlns:a16="http://schemas.microsoft.com/office/drawing/2014/main" id="{94AA548E-E8FA-4F54-A1E1-65D8C587F7E7}"/>
               </a:ext>
             </a:extLst>
           </p:cNvPr>
@@ -2757,7 +2917,7 @@
           <p:cNvPr id="7" name="">
             <a:extLst xmlns:a="http://schemas.openxmlformats.org/drawingml/2006/main">
               <a:ext uri="{FF2B5EF4-FFF2-40B4-BE49-F238E27FC236}">
-                <a16:creationId xmlns:a16="http://schemas.microsoft.com/office/drawing/2014/main" id="{F8DE96F7-2B18-4DEA-902A-A61FDE79C0EC}"/>
+                <a16:creationId xmlns:a16="http://schemas.microsoft.com/office/drawing/2014/main" id="{8F0C7BB9-444C-4C98-BAA3-CFF514B21DF9}"/>
               </a:ext>
             </a:extLst>
           </p:cNvPr>
@@ -2812,7 +2972,7 @@
     </p:spTree>
     <p:extLst>
       <p:ext uri="{BB962C8B-B14F-4D97-AF65-F5344CB8AC3E}">
-        <p14:creationId xmlns:p14="http://schemas.microsoft.com/office/powerpoint/2010/main" val="1357929467"/>
+        <p14:creationId xmlns:p14="http://schemas.microsoft.com/office/powerpoint/2010/main" val="974648236"/>
       </p:ext>
     </p:extLst>
   </p:cSld>
@@ -2843,7 +3003,7 @@
           <p:cNvPr id="12" name="">
             <a:extLst xmlns:a="http://schemas.openxmlformats.org/drawingml/2006/main">
               <a:ext uri="{FF2B5EF4-FFF2-40B4-BE49-F238E27FC236}">
-                <a16:creationId xmlns:a16="http://schemas.microsoft.com/office/drawing/2014/main" id="{7184A03C-A3F8-4E62-86A9-E8D4D878FE64}"/>
+                <a16:creationId xmlns:a16="http://schemas.microsoft.com/office/drawing/2014/main" id="{C31AB8C6-AF1B-4EC4-B927-BA7FC4917B6E}"/>
               </a:ext>
             </a:extLst>
           </p:cNvPr>
@@ -2900,7 +3060,7 @@
           <p:cNvPr id="2" name="">
             <a:extLst xmlns:a="http://schemas.openxmlformats.org/drawingml/2006/main">
               <a:ext uri="{FF2B5EF4-FFF2-40B4-BE49-F238E27FC236}">
-                <a16:creationId xmlns:a16="http://schemas.microsoft.com/office/drawing/2014/main" id="{6FBD1124-53CA-4129-A4C3-E167F074E3B0}"/>
+                <a16:creationId xmlns:a16="http://schemas.microsoft.com/office/drawing/2014/main" id="{C4A3A3A0-8DC1-45BA-A864-486389CA51DE}"/>
               </a:ext>
             </a:extLst>
           </p:cNvPr>
@@ -2957,7 +3117,7 @@
           <p:cNvPr id="3" name="">
             <a:extLst xmlns:a="http://schemas.openxmlformats.org/drawingml/2006/main">
               <a:ext uri="{FF2B5EF4-FFF2-40B4-BE49-F238E27FC236}">
-                <a16:creationId xmlns:a16="http://schemas.microsoft.com/office/drawing/2014/main" id="{80D342AF-75FB-4F47-90C0-BEAD023AE222}"/>
+                <a16:creationId xmlns:a16="http://schemas.microsoft.com/office/drawing/2014/main" id="{C24495B9-9D3C-4F3B-A5FF-9BAEDBE1EE88}"/>
               </a:ext>
             </a:extLst>
           </p:cNvPr>
@@ -3014,7 +3174,7 @@
           <p:cNvPr id="4" name="">
             <a:extLst xmlns:a="http://schemas.openxmlformats.org/drawingml/2006/main">
               <a:ext uri="{FF2B5EF4-FFF2-40B4-BE49-F238E27FC236}">
-                <a16:creationId xmlns:a16="http://schemas.microsoft.com/office/drawing/2014/main" id="{6E65AB00-1EF7-4D9A-B9DB-9F612C07B9F0}"/>
+                <a16:creationId xmlns:a16="http://schemas.microsoft.com/office/drawing/2014/main" id="{5A9100B4-CB67-4234-8E27-11BCB57316FD}"/>
               </a:ext>
             </a:extLst>
           </p:cNvPr>
@@ -3061,7 +3221,7 @@
                 <a:ea typeface="Manrope"/>
                 <a:cs typeface="Manrope"/>
               </a:rPr>
-              <a:t>Ручной ввод или CSV/XLSX</a:t>
+              <a:t>Ручной ввод или текстовый PDF</a:t>
             </a:r>
           </a:p>
         </p:txBody>
@@ -3071,7 +3231,7 @@
           <p:cNvPr id="5" name="">
             <a:extLst xmlns:a="http://schemas.openxmlformats.org/drawingml/2006/main">
               <a:ext uri="{FF2B5EF4-FFF2-40B4-BE49-F238E27FC236}">
-                <a16:creationId xmlns:a16="http://schemas.microsoft.com/office/drawing/2014/main" id="{3641C39A-4598-4F16-A1AF-FD60804234B0}"/>
+                <a16:creationId xmlns:a16="http://schemas.microsoft.com/office/drawing/2014/main" id="{83217F2C-5229-468B-BE68-114FA6BEBF32}"/>
               </a:ext>
             </a:extLst>
           </p:cNvPr>
@@ -3128,7 +3288,7 @@
           <p:cNvPr id="6" name="">
             <a:extLst xmlns:a="http://schemas.openxmlformats.org/drawingml/2006/main">
               <a:ext uri="{FF2B5EF4-FFF2-40B4-BE49-F238E27FC236}">
-                <a16:creationId xmlns:a16="http://schemas.microsoft.com/office/drawing/2014/main" id="{1882599F-A62A-44C2-9020-91C67EC3A6CD}"/>
+                <a16:creationId xmlns:a16="http://schemas.microsoft.com/office/drawing/2014/main" id="{08C705B9-6CA8-410B-8FA5-7B801A5AE268}"/>
               </a:ext>
             </a:extLst>
           </p:cNvPr>
@@ -3185,7 +3345,7 @@
           <p:cNvPr id="7" name="">
             <a:extLst xmlns:a="http://schemas.openxmlformats.org/drawingml/2006/main">
               <a:ext uri="{FF2B5EF4-FFF2-40B4-BE49-F238E27FC236}">
-                <a16:creationId xmlns:a16="http://schemas.microsoft.com/office/drawing/2014/main" id="{D49BE8D2-9887-46BA-BAC0-8AAD6880C9E4}"/>
+                <a16:creationId xmlns:a16="http://schemas.microsoft.com/office/drawing/2014/main" id="{1C229906-9125-4B86-8C38-5125C45944B0}"/>
               </a:ext>
             </a:extLst>
           </p:cNvPr>
@@ -3242,7 +3402,7 @@
           <p:cNvPr id="8" name="">
             <a:extLst xmlns:a="http://schemas.openxmlformats.org/drawingml/2006/main">
               <a:ext uri="{FF2B5EF4-FFF2-40B4-BE49-F238E27FC236}">
-                <a16:creationId xmlns:a16="http://schemas.microsoft.com/office/drawing/2014/main" id="{A2533A99-0368-426C-B6B1-04CDDCE5A540}"/>
+                <a16:creationId xmlns:a16="http://schemas.microsoft.com/office/drawing/2014/main" id="{78DAFBCF-0F0D-41D7-ABCD-416550B3E7EF}"/>
               </a:ext>
             </a:extLst>
           </p:cNvPr>
@@ -3289,7 +3449,7 @@
                 <a:ea typeface="Manrope"/>
                 <a:cs typeface="Manrope"/>
               </a:rPr>
-              <a:t>Даты Excel в результатах останавливают импорт.</a:t>
+              <a:t>Проверяем числа, единицы и повторные результаты.</a:t>
             </a:r>
           </a:p>
           <a:p xmlns:a="http://schemas.openxmlformats.org/drawingml/2006/main">
@@ -3322,7 +3482,7 @@
           <p:cNvPr id="9" name="">
             <a:extLst xmlns:a="http://schemas.openxmlformats.org/drawingml/2006/main">
               <a:ext uri="{FF2B5EF4-FFF2-40B4-BE49-F238E27FC236}">
-                <a16:creationId xmlns:a16="http://schemas.microsoft.com/office/drawing/2014/main" id="{9C2998E0-719B-46EE-8A5A-27157235DDB6}"/>
+                <a16:creationId xmlns:a16="http://schemas.microsoft.com/office/drawing/2014/main" id="{8927EFD8-F6BB-438D-B7E6-6D22610F8C13}"/>
               </a:ext>
             </a:extLst>
           </p:cNvPr>
@@ -3379,7 +3539,7 @@
           <p:cNvPr id="10" name="">
             <a:extLst xmlns:a="http://schemas.openxmlformats.org/drawingml/2006/main">
               <a:ext uri="{FF2B5EF4-FFF2-40B4-BE49-F238E27FC236}">
-                <a16:creationId xmlns:a16="http://schemas.microsoft.com/office/drawing/2014/main" id="{7155C3CC-521A-44B4-9F8E-315BD65B0324}"/>
+                <a16:creationId xmlns:a16="http://schemas.microsoft.com/office/drawing/2014/main" id="{FFEE55EC-BCE7-4DA6-81E4-A8CB69BA38AC}"/>
               </a:ext>
             </a:extLst>
           </p:cNvPr>
@@ -3436,7 +3596,7 @@
           <p:cNvPr id="11" name="">
             <a:extLst xmlns:a="http://schemas.openxmlformats.org/drawingml/2006/main">
               <a:ext uri="{FF2B5EF4-FFF2-40B4-BE49-F238E27FC236}">
-                <a16:creationId xmlns:a16="http://schemas.microsoft.com/office/drawing/2014/main" id="{23EC66E7-1D8E-49FD-94EC-DD3C935333EC}"/>
+                <a16:creationId xmlns:a16="http://schemas.microsoft.com/office/drawing/2014/main" id="{B3243815-B035-438D-9939-332AE01403C9}"/>
               </a:ext>
             </a:extLst>
           </p:cNvPr>
@@ -3483,7 +3643,7 @@
                 <a:ea typeface="Manrope"/>
                 <a:cs typeface="Manrope"/>
               </a:rPr>
-              <a:t>Сервис не восстанавливает медицинские числа догадкой.</a:t>
+              <a:t>Пользователь подтверждает значения перед переносом в форму.</a:t>
             </a:r>
           </a:p>
         </p:txBody>
@@ -3491,7 +3651,7 @@
     </p:spTree>
     <p:extLst>
       <p:ext uri="{BB962C8B-B14F-4D97-AF65-F5344CB8AC3E}">
-        <p14:creationId xmlns:p14="http://schemas.microsoft.com/office/powerpoint/2010/main" val="326843616"/>
+        <p14:creationId xmlns:p14="http://schemas.microsoft.com/office/powerpoint/2010/main" val="890074627"/>
       </p:ext>
     </p:extLst>
   </p:cSld>
@@ -3522,7 +3682,7 @@
           <p:cNvPr id="12" name="">
             <a:extLst xmlns:a="http://schemas.openxmlformats.org/drawingml/2006/main">
               <a:ext uri="{FF2B5EF4-FFF2-40B4-BE49-F238E27FC236}">
-                <a16:creationId xmlns:a16="http://schemas.microsoft.com/office/drawing/2014/main" id="{AA06F64D-72AE-4E5B-BEE4-36D668D7B9EF}"/>
+                <a16:creationId xmlns:a16="http://schemas.microsoft.com/office/drawing/2014/main" id="{3414D073-CEEA-4411-A0B2-2F741167FDE0}"/>
               </a:ext>
             </a:extLst>
           </p:cNvPr>
@@ -3579,7 +3739,7 @@
           <p:cNvPr id="2" name="">
             <a:extLst xmlns:a="http://schemas.openxmlformats.org/drawingml/2006/main">
               <a:ext uri="{FF2B5EF4-FFF2-40B4-BE49-F238E27FC236}">
-                <a16:creationId xmlns:a16="http://schemas.microsoft.com/office/drawing/2014/main" id="{E1FBAB2A-1D4E-40AF-9439-AC0E784651DF}"/>
+                <a16:creationId xmlns:a16="http://schemas.microsoft.com/office/drawing/2014/main" id="{B155EEFF-0AA2-42F3-800D-7E7D93BCD905}"/>
               </a:ext>
             </a:extLst>
           </p:cNvPr>
@@ -3636,7 +3796,7 @@
           <p:cNvPr id="3" name="">
             <a:extLst xmlns:a="http://schemas.openxmlformats.org/drawingml/2006/main">
               <a:ext uri="{FF2B5EF4-FFF2-40B4-BE49-F238E27FC236}">
-                <a16:creationId xmlns:a16="http://schemas.microsoft.com/office/drawing/2014/main" id="{19BB1B67-0964-42D6-803A-42B7AC72635D}"/>
+                <a16:creationId xmlns:a16="http://schemas.microsoft.com/office/drawing/2014/main" id="{4671E10E-635D-4663-A9F1-D377EE62D40C}"/>
               </a:ext>
             </a:extLst>
           </p:cNvPr>
@@ -3693,7 +3853,7 @@
           <p:cNvPr id="4" name="">
             <a:extLst xmlns:a="http://schemas.openxmlformats.org/drawingml/2006/main">
               <a:ext uri="{FF2B5EF4-FFF2-40B4-BE49-F238E27FC236}">
-                <a16:creationId xmlns:a16="http://schemas.microsoft.com/office/drawing/2014/main" id="{1A661B15-3B7D-4CB6-962A-7F37382599B2}"/>
+                <a16:creationId xmlns:a16="http://schemas.microsoft.com/office/drawing/2014/main" id="{D7B56F5E-4E13-4D34-83D2-CCD638BBA73E}"/>
               </a:ext>
             </a:extLst>
           </p:cNvPr>
@@ -3750,7 +3910,7 @@
           <p:cNvPr id="5" name="">
             <a:extLst xmlns:a="http://schemas.openxmlformats.org/drawingml/2006/main">
               <a:ext uri="{FF2B5EF4-FFF2-40B4-BE49-F238E27FC236}">
-                <a16:creationId xmlns:a16="http://schemas.microsoft.com/office/drawing/2014/main" id="{B1AE9E75-252E-4C69-8E86-8311B3EE64AA}"/>
+                <a16:creationId xmlns:a16="http://schemas.microsoft.com/office/drawing/2014/main" id="{17487C53-E04B-4407-B501-C5B7A031B795}"/>
               </a:ext>
             </a:extLst>
           </p:cNvPr>
@@ -3807,7 +3967,7 @@
           <p:cNvPr id="6" name="">
             <a:extLst xmlns:a="http://schemas.openxmlformats.org/drawingml/2006/main">
               <a:ext uri="{FF2B5EF4-FFF2-40B4-BE49-F238E27FC236}">
-                <a16:creationId xmlns:a16="http://schemas.microsoft.com/office/drawing/2014/main" id="{6EC4638A-9D7E-425F-8B80-A1D4A23A9125}"/>
+                <a16:creationId xmlns:a16="http://schemas.microsoft.com/office/drawing/2014/main" id="{46EA6722-9FBD-4FDB-B633-C7E7FD720BAB}"/>
               </a:ext>
             </a:extLst>
           </p:cNvPr>
@@ -3864,7 +4024,7 @@
           <p:cNvPr id="7" name="">
             <a:extLst xmlns:a="http://schemas.openxmlformats.org/drawingml/2006/main">
               <a:ext uri="{FF2B5EF4-FFF2-40B4-BE49-F238E27FC236}">
-                <a16:creationId xmlns:a16="http://schemas.microsoft.com/office/drawing/2014/main" id="{DE2E29DD-6125-4D76-9D44-5ABCE768DA55}"/>
+                <a16:creationId xmlns:a16="http://schemas.microsoft.com/office/drawing/2014/main" id="{5B397C30-FE86-4FA7-A322-3FB0D3F95D10}"/>
               </a:ext>
             </a:extLst>
           </p:cNvPr>
@@ -3921,7 +4081,7 @@
           <p:cNvPr id="8" name="">
             <a:extLst xmlns:a="http://schemas.openxmlformats.org/drawingml/2006/main">
               <a:ext uri="{FF2B5EF4-FFF2-40B4-BE49-F238E27FC236}">
-                <a16:creationId xmlns:a16="http://schemas.microsoft.com/office/drawing/2014/main" id="{D08ECECA-E7DE-4F87-9E9B-A36235B8AA75}"/>
+                <a16:creationId xmlns:a16="http://schemas.microsoft.com/office/drawing/2014/main" id="{5017CF42-AD31-45E3-B043-C94D487A9359}"/>
               </a:ext>
             </a:extLst>
           </p:cNvPr>
@@ -3978,7 +4138,7 @@
           <p:cNvPr id="9" name="">
             <a:extLst xmlns:a="http://schemas.openxmlformats.org/drawingml/2006/main">
               <a:ext uri="{FF2B5EF4-FFF2-40B4-BE49-F238E27FC236}">
-                <a16:creationId xmlns:a16="http://schemas.microsoft.com/office/drawing/2014/main" id="{C21371F8-118C-438D-B77A-4F7F4F72D959}"/>
+                <a16:creationId xmlns:a16="http://schemas.microsoft.com/office/drawing/2014/main" id="{E969CAB8-D37D-4000-919B-C4804252719A}"/>
               </a:ext>
             </a:extLst>
           </p:cNvPr>
@@ -4035,7 +4195,7 @@
           <p:cNvPr id="10" name="">
             <a:extLst xmlns:a="http://schemas.openxmlformats.org/drawingml/2006/main">
               <a:ext uri="{FF2B5EF4-FFF2-40B4-BE49-F238E27FC236}">
-                <a16:creationId xmlns:a16="http://schemas.microsoft.com/office/drawing/2014/main" id="{1ABEB227-5B6E-4334-B564-C702302E0ACD}"/>
+                <a16:creationId xmlns:a16="http://schemas.microsoft.com/office/drawing/2014/main" id="{14418EDC-F7C1-4A19-A486-703088B04169}"/>
               </a:ext>
             </a:extLst>
           </p:cNvPr>
@@ -4092,7 +4252,7 @@
           <p:cNvPr id="11" name="">
             <a:extLst xmlns:a="http://schemas.openxmlformats.org/drawingml/2006/main">
               <a:ext uri="{FF2B5EF4-FFF2-40B4-BE49-F238E27FC236}">
-                <a16:creationId xmlns:a16="http://schemas.microsoft.com/office/drawing/2014/main" id="{5120788C-FFE3-4C07-8CB5-525A6E015AA9}"/>
+                <a16:creationId xmlns:a16="http://schemas.microsoft.com/office/drawing/2014/main" id="{B068B33F-5258-4232-A453-279F5816B5A4}"/>
               </a:ext>
             </a:extLst>
           </p:cNvPr>
@@ -4147,7 +4307,7 @@
     </p:spTree>
     <p:extLst>
       <p:ext uri="{BB962C8B-B14F-4D97-AF65-F5344CB8AC3E}">
-        <p14:creationId xmlns:p14="http://schemas.microsoft.com/office/powerpoint/2010/main" val="1775314771"/>
+        <p14:creationId xmlns:p14="http://schemas.microsoft.com/office/powerpoint/2010/main" val="1021506919"/>
       </p:ext>
     </p:extLst>
   </p:cSld>
@@ -4178,7 +4338,7 @@
           <p:cNvPr id="7" name="">
             <a:extLst xmlns:a="http://schemas.openxmlformats.org/drawingml/2006/main">
               <a:ext uri="{FF2B5EF4-FFF2-40B4-BE49-F238E27FC236}">
-                <a16:creationId xmlns:a16="http://schemas.microsoft.com/office/drawing/2014/main" id="{E62947F9-22D8-4145-A2EF-DA4565A1DF0D}"/>
+                <a16:creationId xmlns:a16="http://schemas.microsoft.com/office/drawing/2014/main" id="{DFBC6469-48F7-40DF-A8FD-89D04EDEE043}"/>
               </a:ext>
             </a:extLst>
           </p:cNvPr>
@@ -4235,7 +4395,7 @@
           <p:cNvPr id="2" name="">
             <a:extLst xmlns:a="http://schemas.openxmlformats.org/drawingml/2006/main">
               <a:ext uri="{FF2B5EF4-FFF2-40B4-BE49-F238E27FC236}">
-                <a16:creationId xmlns:a16="http://schemas.microsoft.com/office/drawing/2014/main" id="{29E9A51C-2BFB-4C9A-8AF2-10D280695F99}"/>
+                <a16:creationId xmlns:a16="http://schemas.microsoft.com/office/drawing/2014/main" id="{1D982588-53B2-40F7-87B2-93C372CC78E9}"/>
               </a:ext>
             </a:extLst>
           </p:cNvPr>
@@ -4292,7 +4452,7 @@
           <p:cNvPr id="3" name="">
             <a:extLst xmlns:a="http://schemas.openxmlformats.org/drawingml/2006/main">
               <a:ext uri="{FF2B5EF4-FFF2-40B4-BE49-F238E27FC236}">
-                <a16:creationId xmlns:a16="http://schemas.microsoft.com/office/drawing/2014/main" id="{3780F6F4-4305-48F0-AE4E-976E8F376833}"/>
+                <a16:creationId xmlns:a16="http://schemas.microsoft.com/office/drawing/2014/main" id="{59C47BF5-E2BD-411B-BC4C-6796C8BC8017}"/>
               </a:ext>
             </a:extLst>
           </p:cNvPr>
@@ -4668,7 +4828,7 @@
           <p:cNvPr id="5" name="">
             <a:extLst xmlns:a="http://schemas.openxmlformats.org/drawingml/2006/main">
               <a:ext uri="{FF2B5EF4-FFF2-40B4-BE49-F238E27FC236}">
-                <a16:creationId xmlns:a16="http://schemas.microsoft.com/office/drawing/2014/main" id="{2B0D722E-9AAF-4AEA-8365-F2C811DAE5C5}"/>
+                <a16:creationId xmlns:a16="http://schemas.microsoft.com/office/drawing/2014/main" id="{37DD738A-32E3-4D3A-8364-684CCBBF845F}"/>
               </a:ext>
             </a:extLst>
           </p:cNvPr>
@@ -4748,7 +4908,7 @@
           <p:cNvPr id="6" name="">
             <a:extLst xmlns:a="http://schemas.openxmlformats.org/drawingml/2006/main">
               <a:ext uri="{FF2B5EF4-FFF2-40B4-BE49-F238E27FC236}">
-                <a16:creationId xmlns:a16="http://schemas.microsoft.com/office/drawing/2014/main" id="{EFAB9441-D63B-4171-BCA1-23A761CAE9AD}"/>
+                <a16:creationId xmlns:a16="http://schemas.microsoft.com/office/drawing/2014/main" id="{C2B33353-E3EE-4578-9D71-30C5BA5F5C57}"/>
               </a:ext>
             </a:extLst>
           </p:cNvPr>
@@ -4803,7 +4963,7 @@
     </p:spTree>
     <p:extLst>
       <p:ext uri="{BB962C8B-B14F-4D97-AF65-F5344CB8AC3E}">
-        <p14:creationId xmlns:p14="http://schemas.microsoft.com/office/powerpoint/2010/main" val="660221627"/>
+        <p14:creationId xmlns:p14="http://schemas.microsoft.com/office/powerpoint/2010/main" val="1524149925"/>
       </p:ext>
     </p:extLst>
   </p:cSld>
@@ -4834,7 +4994,7 @@
           <p:cNvPr id="7" name="">
             <a:extLst xmlns:a="http://schemas.openxmlformats.org/drawingml/2006/main">
               <a:ext uri="{FF2B5EF4-FFF2-40B4-BE49-F238E27FC236}">
-                <a16:creationId xmlns:a16="http://schemas.microsoft.com/office/drawing/2014/main" id="{6CE7D892-5E22-47F2-8880-52CEB0322896}"/>
+                <a16:creationId xmlns:a16="http://schemas.microsoft.com/office/drawing/2014/main" id="{F433DA29-93AA-4DDF-ABBB-330D002D69A6}"/>
               </a:ext>
             </a:extLst>
           </p:cNvPr>
@@ -4891,7 +5051,7 @@
           <p:cNvPr id="2" name="">
             <a:extLst xmlns:a="http://schemas.openxmlformats.org/drawingml/2006/main">
               <a:ext uri="{FF2B5EF4-FFF2-40B4-BE49-F238E27FC236}">
-                <a16:creationId xmlns:a16="http://schemas.microsoft.com/office/drawing/2014/main" id="{B433752D-A332-4E3B-8900-F7EABB100721}"/>
+                <a16:creationId xmlns:a16="http://schemas.microsoft.com/office/drawing/2014/main" id="{529263EB-F2D7-4C56-A40A-A7C1A6C1B472}"/>
               </a:ext>
             </a:extLst>
           </p:cNvPr>
@@ -4948,7 +5108,7 @@
           <p:cNvPr id="3" name="">
             <a:extLst xmlns:a="http://schemas.openxmlformats.org/drawingml/2006/main">
               <a:ext uri="{FF2B5EF4-FFF2-40B4-BE49-F238E27FC236}">
-                <a16:creationId xmlns:a16="http://schemas.microsoft.com/office/drawing/2014/main" id="{9383659C-40A1-41D4-92C2-E5A9A1E6C78A}"/>
+                <a16:creationId xmlns:a16="http://schemas.microsoft.com/office/drawing/2014/main" id="{303B80FF-4CFB-4139-B1FD-A338E35E650D}"/>
               </a:ext>
             </a:extLst>
           </p:cNvPr>
@@ -5005,7 +5165,7 @@
           <p:cNvPr id="4" name="">
             <a:extLst xmlns:a="http://schemas.openxmlformats.org/drawingml/2006/main">
               <a:ext uri="{FF2B5EF4-FFF2-40B4-BE49-F238E27FC236}">
-                <a16:creationId xmlns:a16="http://schemas.microsoft.com/office/drawing/2014/main" id="{47B38036-594B-4E2E-9096-FE079AF13D90}"/>
+                <a16:creationId xmlns:a16="http://schemas.microsoft.com/office/drawing/2014/main" id="{61C50B4C-9913-4FE1-8F41-9A90696AD9C4}"/>
               </a:ext>
             </a:extLst>
           </p:cNvPr>
@@ -5108,7 +5268,7 @@
           <p:cNvPr id="5" name="">
             <a:extLst xmlns:a="http://schemas.openxmlformats.org/drawingml/2006/main">
               <a:ext uri="{FF2B5EF4-FFF2-40B4-BE49-F238E27FC236}">
-                <a16:creationId xmlns:a16="http://schemas.microsoft.com/office/drawing/2014/main" id="{66E7F4A1-549F-4757-8BF2-06654444FDAD}"/>
+                <a16:creationId xmlns:a16="http://schemas.microsoft.com/office/drawing/2014/main" id="{ECA6161A-0E94-4D20-B54E-38DD19AEA878}"/>
               </a:ext>
             </a:extLst>
           </p:cNvPr>
@@ -5188,7 +5348,7 @@
           <p:cNvPr id="6" name="">
             <a:extLst xmlns:a="http://schemas.openxmlformats.org/drawingml/2006/main">
               <a:ext uri="{FF2B5EF4-FFF2-40B4-BE49-F238E27FC236}">
-                <a16:creationId xmlns:a16="http://schemas.microsoft.com/office/drawing/2014/main" id="{0EB7A405-4C8A-40EB-B6A5-7E0AC3E6CFE4}"/>
+                <a16:creationId xmlns:a16="http://schemas.microsoft.com/office/drawing/2014/main" id="{4618F270-3638-4815-8C8F-E4434191C049}"/>
               </a:ext>
             </a:extLst>
           </p:cNvPr>
@@ -5243,7 +5403,7 @@
     </p:spTree>
     <p:extLst>
       <p:ext uri="{BB962C8B-B14F-4D97-AF65-F5344CB8AC3E}">
-        <p14:creationId xmlns:p14="http://schemas.microsoft.com/office/powerpoint/2010/main" val="1927694967"/>
+        <p14:creationId xmlns:p14="http://schemas.microsoft.com/office/powerpoint/2010/main" val="322253289"/>
       </p:ext>
     </p:extLst>
   </p:cSld>
@@ -5274,7 +5434,7 @@
           <p:cNvPr id="7" name="">
             <a:extLst xmlns:a="http://schemas.openxmlformats.org/drawingml/2006/main">
               <a:ext uri="{FF2B5EF4-FFF2-40B4-BE49-F238E27FC236}">
-                <a16:creationId xmlns:a16="http://schemas.microsoft.com/office/drawing/2014/main" id="{2C6CECEB-E56E-4F03-89A6-D36983E4350E}"/>
+                <a16:creationId xmlns:a16="http://schemas.microsoft.com/office/drawing/2014/main" id="{D4A677F8-C5B3-4DC5-A603-D59F4FCD2BF2}"/>
               </a:ext>
             </a:extLst>
           </p:cNvPr>
@@ -5331,7 +5491,7 @@
           <p:cNvPr id="2" name="">
             <a:extLst xmlns:a="http://schemas.openxmlformats.org/drawingml/2006/main">
               <a:ext uri="{FF2B5EF4-FFF2-40B4-BE49-F238E27FC236}">
-                <a16:creationId xmlns:a16="http://schemas.microsoft.com/office/drawing/2014/main" id="{AC4756F0-6EB4-49B0-A84E-2C674826409B}"/>
+                <a16:creationId xmlns:a16="http://schemas.microsoft.com/office/drawing/2014/main" id="{44E0CBEA-D135-482D-A074-DF99CAE6F602}"/>
               </a:ext>
             </a:extLst>
           </p:cNvPr>
@@ -5388,7 +5548,7 @@
           <p:cNvPr id="3" name="">
             <a:extLst xmlns:a="http://schemas.openxmlformats.org/drawingml/2006/main">
               <a:ext uri="{FF2B5EF4-FFF2-40B4-BE49-F238E27FC236}">
-                <a16:creationId xmlns:a16="http://schemas.microsoft.com/office/drawing/2014/main" id="{8D91A147-1F3A-43FE-A58F-EF8537E692BD}"/>
+                <a16:creationId xmlns:a16="http://schemas.microsoft.com/office/drawing/2014/main" id="{9CC3FED0-AA84-45A6-A873-BC263DECD78C}"/>
               </a:ext>
             </a:extLst>
           </p:cNvPr>
@@ -5445,7 +5605,7 @@
           <p:cNvPr id="4" name="">
             <a:extLst xmlns:a="http://schemas.openxmlformats.org/drawingml/2006/main">
               <a:ext uri="{FF2B5EF4-FFF2-40B4-BE49-F238E27FC236}">
-                <a16:creationId xmlns:a16="http://schemas.microsoft.com/office/drawing/2014/main" id="{31337456-2330-4FFD-8696-15105E0B731D}"/>
+                <a16:creationId xmlns:a16="http://schemas.microsoft.com/office/drawing/2014/main" id="{67F8EE81-EFCA-4D77-9DDE-1299DEFD887C}"/>
               </a:ext>
             </a:extLst>
           </p:cNvPr>
@@ -5492,7 +5652,7 @@
                 <a:ea typeface="Manrope"/>
                 <a:cs typeface="Manrope"/>
               </a:rPr>
-              <a:t>Открыть автономный HTML. Загрузить учебные данные.</a:t>
+              <a:t>Открыть автономный HTML. Выбрать учебный пример.</a:t>
             </a:r>
           </a:p>
           <a:p xmlns:a="http://schemas.openxmlformats.org/drawingml/2006/main">
@@ -5525,7 +5685,7 @@
           <p:cNvPr id="5" name="">
             <a:extLst xmlns:a="http://schemas.openxmlformats.org/drawingml/2006/main">
               <a:ext uri="{FF2B5EF4-FFF2-40B4-BE49-F238E27FC236}">
-                <a16:creationId xmlns:a16="http://schemas.microsoft.com/office/drawing/2014/main" id="{98E8A0EF-A66B-4472-A301-321ED0AD36E1}"/>
+                <a16:creationId xmlns:a16="http://schemas.microsoft.com/office/drawing/2014/main" id="{F9B4390A-7A71-4627-91B4-4DF03AE2DB7D}"/>
               </a:ext>
             </a:extLst>
           </p:cNvPr>
@@ -5582,7 +5742,7 @@
           <p:cNvPr id="6" name="">
             <a:extLst xmlns:a="http://schemas.openxmlformats.org/drawingml/2006/main">
               <a:ext uri="{FF2B5EF4-FFF2-40B4-BE49-F238E27FC236}">
-                <a16:creationId xmlns:a16="http://schemas.microsoft.com/office/drawing/2014/main" id="{D7F4DD80-BE17-4564-B01A-A2253B69DF05}"/>
+                <a16:creationId xmlns:a16="http://schemas.microsoft.com/office/drawing/2014/main" id="{25C853FC-1C3A-4765-97A7-38B7EA614925}"/>
               </a:ext>
             </a:extLst>
           </p:cNvPr>
@@ -5660,7 +5820,7 @@
     </p:spTree>
     <p:extLst>
       <p:ext uri="{BB962C8B-B14F-4D97-AF65-F5344CB8AC3E}">
-        <p14:creationId xmlns:p14="http://schemas.microsoft.com/office/powerpoint/2010/main" val="195824572"/>
+        <p14:creationId xmlns:p14="http://schemas.microsoft.com/office/powerpoint/2010/main" val="1226441217"/>
       </p:ext>
     </p:extLst>
   </p:cSld>
